--- a/Clase_11/PPT/Clase11_Regresion_Multiple.pptx
+++ b/Clase_11/PPT/Clase11_Regresion_Multiple.pptx
@@ -3208,7 +3208,7 @@
         </p:nvGraphicFramePr>
         <p:xfrm>
           <a:off x="548640" y="2057400"/>
-          <a:ext cx="11091672" cy="914400"/>
+          <a:ext cx="11091672" cy="2523744"/>
         </p:xfrm>
         <a:graphic>
           <a:graphicData uri="http://schemas.openxmlformats.org/drawingml/2006/table">
@@ -10821,7 +10821,7 @@
         </p:nvSpPr>
         <p:spPr>
           <a:xfrm>
-            <a:off x="8046720" y="4928616"/>
+            <a:off x="8092440" y="4928616"/>
             <a:ext cx="3520440" cy="1024128"/>
           </a:xfrm>
           <a:prstGeom prst="roundRect">
@@ -12796,7 +12796,29 @@
                 <a:ea typeface="Calibri" pitchFamily="34" charset="-122"/>
                 <a:cs typeface="Calibri" pitchFamily="34" charset="-120"/>
               </a:rPr>
-              <a:t>Es la pregunta que separa un análisis de un modelo que se pone en producción.</a:t>
+              <a:t>Es la pregunta que separa un análisis de un modelo que se pone en </a:t>
+            </a:r>
+            <a:r>
+              <a:rPr lang="en-US" sz="1150" b="1" i="1" dirty="0">
+                <a:solidFill>
+                  <a:srgbClr val="8FA6D4"/>
+                </a:solidFill>
+                <a:latin typeface="Calibri" pitchFamily="34" charset="0"/>
+                <a:ea typeface="Calibri" pitchFamily="34" charset="-122"/>
+                <a:cs typeface="Calibri" pitchFamily="34" charset="-120"/>
+              </a:rPr>
+              <a:t>producción</a:t>
+            </a:r>
+            <a:r>
+              <a:rPr lang="en-US" sz="1150" i="1" dirty="0">
+                <a:solidFill>
+                  <a:srgbClr val="8FA6D4"/>
+                </a:solidFill>
+                <a:latin typeface="Calibri" pitchFamily="34" charset="0"/>
+                <a:ea typeface="Calibri" pitchFamily="34" charset="-122"/>
+                <a:cs typeface="Calibri" pitchFamily="34" charset="-120"/>
+              </a:rPr>
+              <a:t>.</a:t>
             </a:r>
             <a:endParaRPr lang="en-US" sz="1150" dirty="0"/>
           </a:p>
@@ -17995,7 +18017,7 @@
         </p:nvSpPr>
         <p:spPr>
           <a:xfrm>
-            <a:off x="548640" y="2057400"/>
+            <a:off x="512064" y="2066544"/>
             <a:ext cx="5468112" cy="2057400"/>
           </a:xfrm>
           <a:prstGeom prst="roundRect">
